--- a/Mid Project.pptx
+++ b/Mid Project.pptx
@@ -3905,7 +3905,7 @@
 <dgm:dataModel xmlns:dgm="http://schemas.openxmlformats.org/drawingml/2006/diagram" xmlns:a="http://schemas.openxmlformats.org/drawingml/2006/main">
   <dgm:ptLst>
     <dgm:pt modelId="{30C77633-DE95-4FE1-9C99-413FF451BB60}" type="doc">
-      <dgm:prSet loTypeId="urn:microsoft.com/office/officeart/2005/8/layout/vList2" loCatId="list" qsTypeId="urn:microsoft.com/office/officeart/2005/8/quickstyle/simple1" qsCatId="simple" csTypeId="urn:microsoft.com/office/officeart/2005/8/colors/colorful2" csCatId="colorful"/>
+      <dgm:prSet loTypeId="urn:microsoft.com/office/officeart/2005/8/layout/vList2" loCatId="list" qsTypeId="urn:microsoft.com/office/officeart/2005/8/quickstyle/simple1" qsCatId="simple" csTypeId="urn:microsoft.com/office/officeart/2005/8/colors/colorful2" csCatId="colorful" phldr="1"/>
       <dgm:spPr/>
       <dgm:t>
         <a:bodyPr/>
@@ -3995,8 +3995,8 @@
         <a:lstStyle/>
         <a:p>
           <a:r>
-            <a:rPr lang="en-US"/>
-            <a:t>Dataset contains 19,158 rows &amp; 14 columns before cleaning</a:t>
+            <a:rPr lang="en-US" dirty="0"/>
+            <a:t>Dataset contains 21,287 rows &amp; 14 columns before cleaning</a:t>
           </a:r>
         </a:p>
       </dgm:t>
@@ -4345,8 +4345,12 @@
         <a:lstStyle/>
         <a:p>
           <a:r>
-            <a:rPr lang="en-US"/>
-            <a:t>major_discipline :Education major discipline of candidate</a:t>
+            <a:rPr lang="en-US" dirty="0" err="1"/>
+            <a:t>major_discipline</a:t>
+          </a:r>
+          <a:r>
+            <a:rPr lang="en-US" dirty="0"/>
+            <a:t> :Education major discipline of candidate</a:t>
           </a:r>
         </a:p>
       </dgm:t>
@@ -7191,8 +7195,8 @@
             <a:buChar char="•"/>
           </a:pPr>
           <a:r>
-            <a:rPr lang="en-US" sz="2300" kern="1200"/>
-            <a:t>Dataset contains 19,158 rows &amp; 14 columns before cleaning</a:t>
+            <a:rPr lang="en-US" sz="2300" kern="1200" dirty="0"/>
+            <a:t>Dataset contains 21,287 rows &amp; 14 columns before cleaning</a:t>
           </a:r>
         </a:p>
       </dsp:txBody>
@@ -8083,8 +8087,12 @@
             <a:buNone/>
           </a:pPr>
           <a:r>
-            <a:rPr lang="en-US" sz="1800" kern="1200"/>
-            <a:t>major_discipline :Education major discipline of candidate</a:t>
+            <a:rPr lang="en-US" sz="1800" kern="1200" dirty="0" err="1"/>
+            <a:t>major_discipline</a:t>
+          </a:r>
+          <a:r>
+            <a:rPr lang="en-US" sz="1800" kern="1200" dirty="0"/>
+            <a:t> :Education major discipline of candidate</a:t>
           </a:r>
         </a:p>
       </dsp:txBody>
@@ -18690,7 +18698,7 @@
           <a:p>
             <a:fld id="{E14F3475-764A-4454-AD92-257AFB9A2568}" type="datetimeFigureOut">
               <a:rPr lang="en-US" smtClean="0"/>
-              <a:t>24-May-25</a:t>
+              <a:t>26-May-25</a:t>
             </a:fld>
             <a:endParaRPr lang="en-US"/>
           </a:p>
@@ -19188,7 +19196,7 @@
           <a:p>
             <a:fld id="{7AD25C44-FD87-4158-A840-6D2BB5650DF0}" type="datetimeFigureOut">
               <a:rPr lang="en-US" smtClean="0"/>
-              <a:t>24-May-25</a:t>
+              <a:t>26-May-25</a:t>
             </a:fld>
             <a:endParaRPr lang="en-US"/>
           </a:p>
@@ -19386,7 +19394,7 @@
           <a:p>
             <a:fld id="{7AD25C44-FD87-4158-A840-6D2BB5650DF0}" type="datetimeFigureOut">
               <a:rPr lang="en-US" smtClean="0"/>
-              <a:t>24-May-25</a:t>
+              <a:t>26-May-25</a:t>
             </a:fld>
             <a:endParaRPr lang="en-US"/>
           </a:p>
@@ -19594,7 +19602,7 @@
           <a:p>
             <a:fld id="{7AD25C44-FD87-4158-A840-6D2BB5650DF0}" type="datetimeFigureOut">
               <a:rPr lang="en-US" smtClean="0"/>
-              <a:t>24-May-25</a:t>
+              <a:t>26-May-25</a:t>
             </a:fld>
             <a:endParaRPr lang="en-US"/>
           </a:p>
@@ -19792,7 +19800,7 @@
           <a:p>
             <a:fld id="{7AD25C44-FD87-4158-A840-6D2BB5650DF0}" type="datetimeFigureOut">
               <a:rPr lang="en-US" smtClean="0"/>
-              <a:t>24-May-25</a:t>
+              <a:t>26-May-25</a:t>
             </a:fld>
             <a:endParaRPr lang="en-US"/>
           </a:p>
@@ -20067,7 +20075,7 @@
           <a:p>
             <a:fld id="{7AD25C44-FD87-4158-A840-6D2BB5650DF0}" type="datetimeFigureOut">
               <a:rPr lang="en-US" smtClean="0"/>
-              <a:t>24-May-25</a:t>
+              <a:t>26-May-25</a:t>
             </a:fld>
             <a:endParaRPr lang="en-US"/>
           </a:p>
@@ -20332,7 +20340,7 @@
           <a:p>
             <a:fld id="{7AD25C44-FD87-4158-A840-6D2BB5650DF0}" type="datetimeFigureOut">
               <a:rPr lang="en-US" smtClean="0"/>
-              <a:t>24-May-25</a:t>
+              <a:t>26-May-25</a:t>
             </a:fld>
             <a:endParaRPr lang="en-US"/>
           </a:p>
@@ -20744,7 +20752,7 @@
           <a:p>
             <a:fld id="{7AD25C44-FD87-4158-A840-6D2BB5650DF0}" type="datetimeFigureOut">
               <a:rPr lang="en-US" smtClean="0"/>
-              <a:t>24-May-25</a:t>
+              <a:t>26-May-25</a:t>
             </a:fld>
             <a:endParaRPr lang="en-US"/>
           </a:p>
@@ -20885,7 +20893,7 @@
           <a:p>
             <a:fld id="{7AD25C44-FD87-4158-A840-6D2BB5650DF0}" type="datetimeFigureOut">
               <a:rPr lang="en-US" smtClean="0"/>
-              <a:t>24-May-25</a:t>
+              <a:t>26-May-25</a:t>
             </a:fld>
             <a:endParaRPr lang="en-US"/>
           </a:p>
@@ -20998,7 +21006,7 @@
           <a:p>
             <a:fld id="{7AD25C44-FD87-4158-A840-6D2BB5650DF0}" type="datetimeFigureOut">
               <a:rPr lang="en-US" smtClean="0"/>
-              <a:t>24-May-25</a:t>
+              <a:t>26-May-25</a:t>
             </a:fld>
             <a:endParaRPr lang="en-US"/>
           </a:p>
@@ -21309,7 +21317,7 @@
           <a:p>
             <a:fld id="{7AD25C44-FD87-4158-A840-6D2BB5650DF0}" type="datetimeFigureOut">
               <a:rPr lang="en-US" smtClean="0"/>
-              <a:t>24-May-25</a:t>
+              <a:t>26-May-25</a:t>
             </a:fld>
             <a:endParaRPr lang="en-US"/>
           </a:p>
@@ -21597,7 +21605,7 @@
           <a:p>
             <a:fld id="{7AD25C44-FD87-4158-A840-6D2BB5650DF0}" type="datetimeFigureOut">
               <a:rPr lang="en-US" smtClean="0"/>
-              <a:t>24-May-25</a:t>
+              <a:t>26-May-25</a:t>
             </a:fld>
             <a:endParaRPr lang="en-US"/>
           </a:p>
@@ -21838,7 +21846,7 @@
           <a:p>
             <a:fld id="{7AD25C44-FD87-4158-A840-6D2BB5650DF0}" type="datetimeFigureOut">
               <a:rPr lang="en-US" smtClean="0"/>
-              <a:t>24-May-25</a:t>
+              <a:t>26-May-25</a:t>
             </a:fld>
             <a:endParaRPr lang="en-US"/>
           </a:p>
@@ -23090,17 +23098,19 @@
         </p:nvSpPr>
         <p:spPr>
           <a:xfrm>
-            <a:off x="476459" y="224448"/>
-            <a:ext cx="4999892" cy="941161"/>
+            <a:off x="476458" y="224448"/>
+            <a:ext cx="11034223" cy="941161"/>
           </a:xfrm>
         </p:spPr>
         <p:txBody>
-          <a:bodyPr/>
+          <a:bodyPr>
+            <a:noAutofit/>
+          </a:bodyPr>
           <a:lstStyle/>
           <a:p>
             <a:r>
-              <a:rPr lang="en-US" dirty="0"/>
-              <a:t>Relevant experience</a:t>
+              <a:rPr lang="en-US" sz="2800" dirty="0"/>
+              <a:t>How Relevant experience influence candidate to look for job change?</a:t>
             </a:r>
           </a:p>
         </p:txBody>
@@ -23127,8 +23137,8 @@
         </p:blipFill>
         <p:spPr>
           <a:xfrm>
-            <a:off x="322729" y="1507254"/>
-            <a:ext cx="11187953" cy="4985622"/>
+            <a:off x="322729" y="1085222"/>
+            <a:ext cx="11584568" cy="5407654"/>
           </a:xfrm>
           <a:prstGeom prst="rect">
             <a:avLst/>
@@ -23184,16 +23194,18 @@
         <p:spPr>
           <a:xfrm>
             <a:off x="450352" y="264642"/>
-            <a:ext cx="3944815" cy="890919"/>
+            <a:ext cx="10854044" cy="689951"/>
           </a:xfrm>
         </p:spPr>
         <p:txBody>
-          <a:bodyPr/>
+          <a:bodyPr>
+            <a:noAutofit/>
+          </a:bodyPr>
           <a:lstStyle/>
           <a:p>
             <a:r>
-              <a:rPr lang="en-US" dirty="0"/>
-              <a:t>Experience</a:t>
+              <a:rPr lang="en-US" sz="2800" dirty="0"/>
+              <a:t>How Experience influence candidate to look for job change?</a:t>
             </a:r>
           </a:p>
         </p:txBody>
@@ -23222,8 +23234,8 @@
         </p:blipFill>
         <p:spPr>
           <a:xfrm>
-            <a:off x="450352" y="1356529"/>
-            <a:ext cx="11291296" cy="5269474"/>
+            <a:off x="450352" y="1195754"/>
+            <a:ext cx="11291296" cy="5430249"/>
           </a:xfrm>
         </p:spPr>
       </p:pic>
@@ -23276,16 +23288,18 @@
         <p:spPr>
           <a:xfrm>
             <a:off x="335782" y="199016"/>
-            <a:ext cx="7441642" cy="1026883"/>
+            <a:ext cx="11320306" cy="624949"/>
           </a:xfrm>
         </p:spPr>
         <p:txBody>
-          <a:bodyPr/>
+          <a:bodyPr>
+            <a:noAutofit/>
+          </a:bodyPr>
           <a:lstStyle/>
           <a:p>
             <a:r>
-              <a:rPr lang="en-US" dirty="0"/>
-              <a:t>City development index</a:t>
+              <a:rPr lang="en-US" sz="2800" dirty="0"/>
+              <a:t>How City development index influence candidate to look for job change? </a:t>
             </a:r>
           </a:p>
         </p:txBody>
@@ -23314,8 +23328,8 @@
         </p:blipFill>
         <p:spPr>
           <a:xfrm>
-            <a:off x="194417" y="1225899"/>
-            <a:ext cx="11725056" cy="5433085"/>
+            <a:off x="194417" y="924448"/>
+            <a:ext cx="11725056" cy="5734537"/>
           </a:xfrm>
         </p:spPr>
       </p:pic>
@@ -24619,7 +24633,7 @@
         <p:spPr>
           <a:xfrm>
             <a:off x="828161" y="266316"/>
-            <a:ext cx="10515600" cy="1015592"/>
+            <a:ext cx="10515600" cy="758616"/>
           </a:xfrm>
         </p:spPr>
         <p:txBody>
@@ -24714,17 +24728,17 @@
         </p:nvSpPr>
         <p:spPr>
           <a:xfrm>
-            <a:off x="838200" y="1371600"/>
-            <a:ext cx="10798090" cy="4805363"/>
+            <a:off x="793818" y="1024932"/>
+            <a:ext cx="11244110" cy="5162079"/>
           </a:xfrm>
         </p:spPr>
         <p:txBody>
           <a:bodyPr>
-            <a:normAutofit lnSpcReduction="10000"/>
+            <a:normAutofit/>
           </a:bodyPr>
           <a:lstStyle/>
           <a:p>
-            <a:pPr marL="0" marR="0">
+            <a:pPr marL="0" marR="0" algn="just">
               <a:spcAft>
                 <a:spcPts val="800"/>
               </a:spcAft>
@@ -24741,6 +24755,7 @@
             </a:r>
           </a:p>
           <a:p>
+            <a:pPr algn="just"/>
             <a:endParaRPr lang="en-US" sz="3200" dirty="0"/>
           </a:p>
         </p:txBody>
@@ -24950,7 +24965,7 @@
             <p:ph idx="1"/>
             <p:extLst>
               <p:ext uri="{D42A27DB-BD31-4B8C-83A1-F6EECF244321}">
-                <p14:modId xmlns:p14="http://schemas.microsoft.com/office/powerpoint/2010/main" val="3718508157"/>
+                <p14:modId xmlns:p14="http://schemas.microsoft.com/office/powerpoint/2010/main" val="4255716002"/>
               </p:ext>
             </p:extLst>
           </p:nvPr>
@@ -30151,16 +30166,18 @@
         <p:spPr>
           <a:xfrm>
             <a:off x="623048" y="200802"/>
-            <a:ext cx="2141668" cy="810532"/>
+            <a:ext cx="10299510" cy="810532"/>
           </a:xfrm>
         </p:spPr>
         <p:txBody>
-          <a:bodyPr/>
+          <a:bodyPr>
+            <a:noAutofit/>
+          </a:bodyPr>
           <a:lstStyle/>
           <a:p>
             <a:r>
-              <a:rPr lang="en-US" dirty="0"/>
-              <a:t>Gender</a:t>
+              <a:rPr lang="en-US" sz="3200" dirty="0"/>
+              <a:t>How Gender influence candidate to look for job change?</a:t>
             </a:r>
           </a:p>
         </p:txBody>
@@ -30838,15 +30855,6 @@
 </file>
 
 <file path=customXml/item1.xml><?xml version="1.0" encoding="utf-8"?>
-<?mso-contentType ?>
-<FormTemplates xmlns="http://schemas.microsoft.com/sharepoint/v3/contenttype/forms">
-  <Display>DocumentLibraryForm</Display>
-  <Edit>DocumentLibraryForm</Edit>
-  <New>DocumentLibraryForm</New>
-</FormTemplates>
-</file>
-
-<file path=customXml/item2.xml><?xml version="1.0" encoding="utf-8"?>
 <ct:contentTypeSchema xmlns:ct="http://schemas.microsoft.com/office/2006/metadata/contentType" xmlns:ma="http://schemas.microsoft.com/office/2006/metadata/properties/metaAttributes" ct:_="" ma:_="" ma:contentTypeName="Document" ma:contentTypeID="0x0101005120618B5A2E8644805649BA27689955" ma:contentTypeVersion="5" ma:contentTypeDescription="Create a new document." ma:contentTypeScope="" ma:versionID="c0306d6e4b6731d442d5861b8e879571">
   <xsd:schema xmlns:xsd="http://www.w3.org/2001/XMLSchema" xmlns:xs="http://www.w3.org/2001/XMLSchema" xmlns:p="http://schemas.microsoft.com/office/2006/metadata/properties" xmlns:ns3="ec1fa480-caa0-4813-ad98-c11e8e01f7d6" targetNamespace="http://schemas.microsoft.com/office/2006/metadata/properties" ma:root="true" ma:fieldsID="e6261c365ba495ad7880cdacf7a8a73e" ns3:_="">
     <xsd:import namespace="ec1fa480-caa0-4813-ad98-c11e8e01f7d6"/>
@@ -30996,6 +31004,15 @@
 </ct:contentTypeSchema>
 </file>
 
+<file path=customXml/item2.xml><?xml version="1.0" encoding="utf-8"?>
+<?mso-contentType ?>
+<FormTemplates xmlns="http://schemas.microsoft.com/sharepoint/v3/contenttype/forms">
+  <Display>DocumentLibraryForm</Display>
+  <Edit>DocumentLibraryForm</Edit>
+  <New>DocumentLibraryForm</New>
+</FormTemplates>
+</file>
+
 <file path=customXml/item3.xml><?xml version="1.0" encoding="utf-8"?>
 <p:properties xmlns:p="http://schemas.microsoft.com/office/2006/metadata/properties" xmlns:xsi="http://www.w3.org/2001/XMLSchema-instance" xmlns:pc="http://schemas.microsoft.com/office/infopath/2007/PartnerControls">
   <documentManagement/>
@@ -31003,14 +31020,6 @@
 </file>
 
 <file path=customXml/itemProps1.xml><?xml version="1.0" encoding="utf-8"?>
-<ds:datastoreItem xmlns:ds="http://schemas.openxmlformats.org/officeDocument/2006/customXml" ds:itemID="{9D1EA841-7D0A-40E4-A4C0-A2D83A63F6E7}">
-  <ds:schemaRefs>
-    <ds:schemaRef ds:uri="http://schemas.microsoft.com/sharepoint/v3/contenttype/forms"/>
-  </ds:schemaRefs>
-</ds:datastoreItem>
-</file>
-
-<file path=customXml/itemProps2.xml><?xml version="1.0" encoding="utf-8"?>
 <ds:datastoreItem xmlns:ds="http://schemas.openxmlformats.org/officeDocument/2006/customXml" ds:itemID="{BE42E56A-8F12-4BAB-BB7B-4AB6926F7375}">
   <ds:schemaRefs>
     <ds:schemaRef ds:uri="http://schemas.microsoft.com/office/2006/metadata/contentType"/>
@@ -31024,6 +31033,14 @@
     <ds:schemaRef ds:uri="http://purl.org/dc/elements/1.1/"/>
     <ds:schemaRef ds:uri="http://purl.org/dc/terms/"/>
     <ds:schemaRef ds:uri="http://schemas.microsoft.com/internal/obd"/>
+  </ds:schemaRefs>
+</ds:datastoreItem>
+</file>
+
+<file path=customXml/itemProps2.xml><?xml version="1.0" encoding="utf-8"?>
+<ds:datastoreItem xmlns:ds="http://schemas.openxmlformats.org/officeDocument/2006/customXml" ds:itemID="{9D1EA841-7D0A-40E4-A4C0-A2D83A63F6E7}">
+  <ds:schemaRefs>
+    <ds:schemaRef ds:uri="http://schemas.microsoft.com/sharepoint/v3/contenttype/forms"/>
   </ds:schemaRefs>
 </ds:datastoreItem>
 </file>

--- a/Mid Project.pptx
+++ b/Mid Project.pptx
@@ -5,7 +5,7 @@
     <p:sldMasterId id="2147483648" r:id="rId4"/>
   </p:sldMasterIdLst>
   <p:notesMasterIdLst>
-    <p:notesMasterId r:id="rId22"/>
+    <p:notesMasterId r:id="rId24"/>
   </p:notesMasterIdLst>
   <p:sldIdLst>
     <p:sldId id="256" r:id="rId5"/>
@@ -15,16 +15,18 @@
     <p:sldId id="260" r:id="rId9"/>
     <p:sldId id="261" r:id="rId10"/>
     <p:sldId id="262" r:id="rId11"/>
-    <p:sldId id="272" r:id="rId12"/>
-    <p:sldId id="263" r:id="rId13"/>
-    <p:sldId id="264" r:id="rId14"/>
-    <p:sldId id="265" r:id="rId15"/>
-    <p:sldId id="266" r:id="rId16"/>
-    <p:sldId id="267" r:id="rId17"/>
-    <p:sldId id="268" r:id="rId18"/>
-    <p:sldId id="269" r:id="rId19"/>
-    <p:sldId id="270" r:id="rId20"/>
-    <p:sldId id="271" r:id="rId21"/>
+    <p:sldId id="263" r:id="rId12"/>
+    <p:sldId id="264" r:id="rId13"/>
+    <p:sldId id="265" r:id="rId14"/>
+    <p:sldId id="274" r:id="rId15"/>
+    <p:sldId id="273" r:id="rId16"/>
+    <p:sldId id="266" r:id="rId17"/>
+    <p:sldId id="267" r:id="rId18"/>
+    <p:sldId id="268" r:id="rId19"/>
+    <p:sldId id="269" r:id="rId20"/>
+    <p:sldId id="270" r:id="rId21"/>
+    <p:sldId id="271" r:id="rId22"/>
+    <p:sldId id="272" r:id="rId23"/>
   </p:sldIdLst>
   <p:sldSz cx="12192000" cy="6858000"/>
   <p:notesSz cx="6858000" cy="9144000"/>
@@ -18698,7 +18700,7 @@
           <a:p>
             <a:fld id="{E14F3475-764A-4454-AD92-257AFB9A2568}" type="datetimeFigureOut">
               <a:rPr lang="en-US" smtClean="0"/>
-              <a:t>26-May-25</a:t>
+              <a:t>30-May-25</a:t>
             </a:fld>
             <a:endParaRPr lang="en-US"/>
           </a:p>
@@ -19196,7 +19198,7 @@
           <a:p>
             <a:fld id="{7AD25C44-FD87-4158-A840-6D2BB5650DF0}" type="datetimeFigureOut">
               <a:rPr lang="en-US" smtClean="0"/>
-              <a:t>26-May-25</a:t>
+              <a:t>30-May-25</a:t>
             </a:fld>
             <a:endParaRPr lang="en-US"/>
           </a:p>
@@ -19394,7 +19396,7 @@
           <a:p>
             <a:fld id="{7AD25C44-FD87-4158-A840-6D2BB5650DF0}" type="datetimeFigureOut">
               <a:rPr lang="en-US" smtClean="0"/>
-              <a:t>26-May-25</a:t>
+              <a:t>30-May-25</a:t>
             </a:fld>
             <a:endParaRPr lang="en-US"/>
           </a:p>
@@ -19602,7 +19604,7 @@
           <a:p>
             <a:fld id="{7AD25C44-FD87-4158-A840-6D2BB5650DF0}" type="datetimeFigureOut">
               <a:rPr lang="en-US" smtClean="0"/>
-              <a:t>26-May-25</a:t>
+              <a:t>30-May-25</a:t>
             </a:fld>
             <a:endParaRPr lang="en-US"/>
           </a:p>
@@ -19800,7 +19802,7 @@
           <a:p>
             <a:fld id="{7AD25C44-FD87-4158-A840-6D2BB5650DF0}" type="datetimeFigureOut">
               <a:rPr lang="en-US" smtClean="0"/>
-              <a:t>26-May-25</a:t>
+              <a:t>30-May-25</a:t>
             </a:fld>
             <a:endParaRPr lang="en-US"/>
           </a:p>
@@ -20075,7 +20077,7 @@
           <a:p>
             <a:fld id="{7AD25C44-FD87-4158-A840-6D2BB5650DF0}" type="datetimeFigureOut">
               <a:rPr lang="en-US" smtClean="0"/>
-              <a:t>26-May-25</a:t>
+              <a:t>30-May-25</a:t>
             </a:fld>
             <a:endParaRPr lang="en-US"/>
           </a:p>
@@ -20340,7 +20342,7 @@
           <a:p>
             <a:fld id="{7AD25C44-FD87-4158-A840-6D2BB5650DF0}" type="datetimeFigureOut">
               <a:rPr lang="en-US" smtClean="0"/>
-              <a:t>26-May-25</a:t>
+              <a:t>30-May-25</a:t>
             </a:fld>
             <a:endParaRPr lang="en-US"/>
           </a:p>
@@ -20752,7 +20754,7 @@
           <a:p>
             <a:fld id="{7AD25C44-FD87-4158-A840-6D2BB5650DF0}" type="datetimeFigureOut">
               <a:rPr lang="en-US" smtClean="0"/>
-              <a:t>26-May-25</a:t>
+              <a:t>30-May-25</a:t>
             </a:fld>
             <a:endParaRPr lang="en-US"/>
           </a:p>
@@ -20893,7 +20895,7 @@
           <a:p>
             <a:fld id="{7AD25C44-FD87-4158-A840-6D2BB5650DF0}" type="datetimeFigureOut">
               <a:rPr lang="en-US" smtClean="0"/>
-              <a:t>26-May-25</a:t>
+              <a:t>30-May-25</a:t>
             </a:fld>
             <a:endParaRPr lang="en-US"/>
           </a:p>
@@ -21006,7 +21008,7 @@
           <a:p>
             <a:fld id="{7AD25C44-FD87-4158-A840-6D2BB5650DF0}" type="datetimeFigureOut">
               <a:rPr lang="en-US" smtClean="0"/>
-              <a:t>26-May-25</a:t>
+              <a:t>30-May-25</a:t>
             </a:fld>
             <a:endParaRPr lang="en-US"/>
           </a:p>
@@ -21317,7 +21319,7 @@
           <a:p>
             <a:fld id="{7AD25C44-FD87-4158-A840-6D2BB5650DF0}" type="datetimeFigureOut">
               <a:rPr lang="en-US" smtClean="0"/>
-              <a:t>26-May-25</a:t>
+              <a:t>30-May-25</a:t>
             </a:fld>
             <a:endParaRPr lang="en-US"/>
           </a:p>
@@ -21605,7 +21607,7 @@
           <a:p>
             <a:fld id="{7AD25C44-FD87-4158-A840-6D2BB5650DF0}" type="datetimeFigureOut">
               <a:rPr lang="en-US" smtClean="0"/>
-              <a:t>26-May-25</a:t>
+              <a:t>30-May-25</a:t>
             </a:fld>
             <a:endParaRPr lang="en-US"/>
           </a:p>
@@ -21846,7 +21848,7 @@
           <a:p>
             <a:fld id="{7AD25C44-FD87-4158-A840-6D2BB5650DF0}" type="datetimeFigureOut">
               <a:rPr lang="en-US" smtClean="0"/>
-              <a:t>26-May-25</a:t>
+              <a:t>30-May-25</a:t>
             </a:fld>
             <a:endParaRPr lang="en-US"/>
           </a:p>
@@ -23085,101 +23087,6 @@
           <p:cNvPr id="2" name="Title 1">
             <a:extLst>
               <a:ext uri="{FF2B5EF4-FFF2-40B4-BE49-F238E27FC236}">
-                <a16:creationId xmlns:a16="http://schemas.microsoft.com/office/drawing/2014/main" id="{7E65967C-A035-73A3-090A-E37B8CB2A77B}"/>
-              </a:ext>
-            </a:extLst>
-          </p:cNvPr>
-          <p:cNvSpPr>
-            <a:spLocks noGrp="1"/>
-          </p:cNvSpPr>
-          <p:nvPr>
-            <p:ph type="title"/>
-          </p:nvPr>
-        </p:nvSpPr>
-        <p:spPr>
-          <a:xfrm>
-            <a:off x="476458" y="224448"/>
-            <a:ext cx="11034223" cy="941161"/>
-          </a:xfrm>
-        </p:spPr>
-        <p:txBody>
-          <a:bodyPr>
-            <a:noAutofit/>
-          </a:bodyPr>
-          <a:lstStyle/>
-          <a:p>
-            <a:r>
-              <a:rPr lang="en-US" sz="2800" dirty="0"/>
-              <a:t>How Relevant experience influence candidate to look for job change?</a:t>
-            </a:r>
-          </a:p>
-        </p:txBody>
-      </p:sp>
-      <p:pic>
-        <p:nvPicPr>
-          <p:cNvPr id="6" name="Picture 5">
-            <a:extLst>
-              <a:ext uri="{FF2B5EF4-FFF2-40B4-BE49-F238E27FC236}">
-                <a16:creationId xmlns:a16="http://schemas.microsoft.com/office/drawing/2014/main" id="{CF95B237-19D6-E6B4-78C0-736C2DDC2825}"/>
-              </a:ext>
-            </a:extLst>
-          </p:cNvPr>
-          <p:cNvPicPr>
-            <a:picLocks noChangeAspect="1"/>
-          </p:cNvPicPr>
-          <p:nvPr/>
-        </p:nvPicPr>
-        <p:blipFill>
-          <a:blip r:embed="rId2"/>
-          <a:stretch>
-            <a:fillRect/>
-          </a:stretch>
-        </p:blipFill>
-        <p:spPr>
-          <a:xfrm>
-            <a:off x="322729" y="1085222"/>
-            <a:ext cx="11584568" cy="5407654"/>
-          </a:xfrm>
-          <a:prstGeom prst="rect">
-            <a:avLst/>
-          </a:prstGeom>
-        </p:spPr>
-      </p:pic>
-    </p:spTree>
-    <p:extLst>
-      <p:ext uri="{BB962C8B-B14F-4D97-AF65-F5344CB8AC3E}">
-        <p14:creationId xmlns:p14="http://schemas.microsoft.com/office/powerpoint/2010/main" val="3226003453"/>
-      </p:ext>
-    </p:extLst>
-  </p:cSld>
-  <p:clrMapOvr>
-    <a:masterClrMapping/>
-  </p:clrMapOvr>
-</p:sld>
-</file>
-
-<file path=ppt/slides/slide11.xml><?xml version="1.0" encoding="utf-8"?>
-<p:sld xmlns:a="http://schemas.openxmlformats.org/drawingml/2006/main" xmlns:r="http://schemas.openxmlformats.org/officeDocument/2006/relationships" xmlns:p="http://schemas.openxmlformats.org/presentationml/2006/main">
-  <p:cSld>
-    <p:spTree>
-      <p:nvGrpSpPr>
-        <p:cNvPr id="1" name=""/>
-        <p:cNvGrpSpPr/>
-        <p:nvPr/>
-      </p:nvGrpSpPr>
-      <p:grpSpPr>
-        <a:xfrm>
-          <a:off x="0" y="0"/>
-          <a:ext cx="0" cy="0"/>
-          <a:chOff x="0" y="0"/>
-          <a:chExt cx="0" cy="0"/>
-        </a:xfrm>
-      </p:grpSpPr>
-      <p:sp>
-        <p:nvSpPr>
-          <p:cNvPr id="2" name="Title 1">
-            <a:extLst>
-              <a:ext uri="{FF2B5EF4-FFF2-40B4-BE49-F238E27FC236}">
                 <a16:creationId xmlns:a16="http://schemas.microsoft.com/office/drawing/2014/main" id="{1D56351B-0499-71E0-6281-00B3895C6A3A}"/>
               </a:ext>
             </a:extLst>
@@ -23252,7 +23159,214 @@
 </p:sld>
 </file>
 
+<file path=ppt/slides/slide11.xml><?xml version="1.0" encoding="utf-8"?>
+<p:sld xmlns:a="http://schemas.openxmlformats.org/drawingml/2006/main" xmlns:r="http://schemas.openxmlformats.org/officeDocument/2006/relationships" xmlns:p="http://schemas.openxmlformats.org/presentationml/2006/main">
+  <p:cSld>
+    <p:spTree>
+      <p:nvGrpSpPr>
+        <p:cNvPr id="1" name=""/>
+        <p:cNvGrpSpPr/>
+        <p:nvPr/>
+      </p:nvGrpSpPr>
+      <p:grpSpPr>
+        <a:xfrm>
+          <a:off x="0" y="0"/>
+          <a:ext cx="0" cy="0"/>
+          <a:chOff x="0" y="0"/>
+          <a:chExt cx="0" cy="0"/>
+        </a:xfrm>
+      </p:grpSpPr>
+      <p:pic>
+        <p:nvPicPr>
+          <p:cNvPr id="5" name="Content Placeholder 4">
+            <a:extLst>
+              <a:ext uri="{FF2B5EF4-FFF2-40B4-BE49-F238E27FC236}">
+                <a16:creationId xmlns:a16="http://schemas.microsoft.com/office/drawing/2014/main" id="{E3C62899-145A-2F4E-FA40-5F62397E68FF}"/>
+              </a:ext>
+            </a:extLst>
+          </p:cNvPr>
+          <p:cNvPicPr>
+            <a:picLocks noGrp="1" noChangeAspect="1"/>
+          </p:cNvPicPr>
+          <p:nvPr>
+            <p:ph idx="1"/>
+          </p:nvPr>
+        </p:nvPicPr>
+        <p:blipFill>
+          <a:blip r:embed="rId2"/>
+          <a:stretch>
+            <a:fillRect/>
+          </a:stretch>
+        </p:blipFill>
+        <p:spPr>
+          <a:xfrm>
+            <a:off x="319183" y="1276141"/>
+            <a:ext cx="11547235" cy="5216734"/>
+          </a:xfrm>
+        </p:spPr>
+      </p:pic>
+      <p:sp>
+        <p:nvSpPr>
+          <p:cNvPr id="6" name="Title 1">
+            <a:extLst>
+              <a:ext uri="{FF2B5EF4-FFF2-40B4-BE49-F238E27FC236}">
+                <a16:creationId xmlns:a16="http://schemas.microsoft.com/office/drawing/2014/main" id="{925F40C1-42F1-17E8-1E99-51685240061A}"/>
+              </a:ext>
+            </a:extLst>
+          </p:cNvPr>
+          <p:cNvSpPr txBox="1">
+            <a:spLocks/>
+          </p:cNvSpPr>
+          <p:nvPr/>
+        </p:nvSpPr>
+        <p:spPr>
+          <a:xfrm>
+            <a:off x="476458" y="224448"/>
+            <a:ext cx="11034223" cy="941161"/>
+          </a:xfrm>
+          <a:prstGeom prst="rect">
+            <a:avLst/>
+          </a:prstGeom>
+        </p:spPr>
+        <p:txBody>
+          <a:bodyPr vert="horz" lIns="91440" tIns="45720" rIns="91440" bIns="45720" rtlCol="0" anchor="ctr">
+            <a:noAutofit/>
+          </a:bodyPr>
+          <a:lstStyle>
+            <a:lvl1pPr algn="l" defTabSz="914400" rtl="0" eaLnBrk="1" latinLnBrk="0" hangingPunct="1">
+              <a:lnSpc>
+                <a:spcPct val="90000"/>
+              </a:lnSpc>
+              <a:spcBef>
+                <a:spcPct val="0"/>
+              </a:spcBef>
+              <a:buNone/>
+              <a:defRPr sz="4400" kern="1200">
+                <a:solidFill>
+                  <a:schemeClr val="tx1"/>
+                </a:solidFill>
+                <a:latin typeface="+mj-lt"/>
+                <a:ea typeface="+mj-ea"/>
+                <a:cs typeface="+mj-cs"/>
+              </a:defRPr>
+            </a:lvl1pPr>
+          </a:lstStyle>
+          <a:p>
+            <a:r>
+              <a:rPr lang="en-US" sz="2800" dirty="0"/>
+              <a:t>How company type influence candidate to look for job change?</a:t>
+            </a:r>
+          </a:p>
+        </p:txBody>
+      </p:sp>
+    </p:spTree>
+    <p:extLst>
+      <p:ext uri="{BB962C8B-B14F-4D97-AF65-F5344CB8AC3E}">
+        <p14:creationId xmlns:p14="http://schemas.microsoft.com/office/powerpoint/2010/main" val="2362707514"/>
+      </p:ext>
+    </p:extLst>
+  </p:cSld>
+  <p:clrMapOvr>
+    <a:masterClrMapping/>
+  </p:clrMapOvr>
+</p:sld>
+</file>
+
 <file path=ppt/slides/slide12.xml><?xml version="1.0" encoding="utf-8"?>
+<p:sld xmlns:a="http://schemas.openxmlformats.org/drawingml/2006/main" xmlns:r="http://schemas.openxmlformats.org/officeDocument/2006/relationships" xmlns:p="http://schemas.openxmlformats.org/presentationml/2006/main">
+  <p:cSld>
+    <p:spTree>
+      <p:nvGrpSpPr>
+        <p:cNvPr id="1" name=""/>
+        <p:cNvGrpSpPr/>
+        <p:nvPr/>
+      </p:nvGrpSpPr>
+      <p:grpSpPr>
+        <a:xfrm>
+          <a:off x="0" y="0"/>
+          <a:ext cx="0" cy="0"/>
+          <a:chOff x="0" y="0"/>
+          <a:chExt cx="0" cy="0"/>
+        </a:xfrm>
+      </p:grpSpPr>
+      <p:pic>
+        <p:nvPicPr>
+          <p:cNvPr id="5" name="Content Placeholder 4">
+            <a:extLst>
+              <a:ext uri="{FF2B5EF4-FFF2-40B4-BE49-F238E27FC236}">
+                <a16:creationId xmlns:a16="http://schemas.microsoft.com/office/drawing/2014/main" id="{915FE575-812D-A6D2-9AF7-83A2A6CC2E90}"/>
+              </a:ext>
+            </a:extLst>
+          </p:cNvPr>
+          <p:cNvPicPr>
+            <a:picLocks noGrp="1" noChangeAspect="1"/>
+          </p:cNvPicPr>
+          <p:nvPr>
+            <p:ph idx="1"/>
+          </p:nvPr>
+        </p:nvPicPr>
+        <p:blipFill>
+          <a:blip r:embed="rId2"/>
+          <a:stretch>
+            <a:fillRect/>
+          </a:stretch>
+        </p:blipFill>
+        <p:spPr>
+          <a:xfrm>
+            <a:off x="279905" y="1055077"/>
+            <a:ext cx="11555340" cy="5200250"/>
+          </a:xfrm>
+        </p:spPr>
+      </p:pic>
+      <p:sp>
+        <p:nvSpPr>
+          <p:cNvPr id="6" name="Title 1">
+            <a:extLst>
+              <a:ext uri="{FF2B5EF4-FFF2-40B4-BE49-F238E27FC236}">
+                <a16:creationId xmlns:a16="http://schemas.microsoft.com/office/drawing/2014/main" id="{2831AE02-15A2-0FD3-D8D1-C8A45752364E}"/>
+              </a:ext>
+            </a:extLst>
+          </p:cNvPr>
+          <p:cNvSpPr>
+            <a:spLocks noGrp="1"/>
+          </p:cNvSpPr>
+          <p:nvPr>
+            <p:ph type="title"/>
+          </p:nvPr>
+        </p:nvSpPr>
+        <p:spPr>
+          <a:xfrm>
+            <a:off x="335782" y="199016"/>
+            <a:ext cx="11320306" cy="624949"/>
+          </a:xfrm>
+        </p:spPr>
+        <p:txBody>
+          <a:bodyPr>
+            <a:noAutofit/>
+          </a:bodyPr>
+          <a:lstStyle/>
+          <a:p>
+            <a:r>
+              <a:rPr lang="en-US" sz="2800" dirty="0"/>
+              <a:t>Company Type vs looking for job change by Education Level </a:t>
+            </a:r>
+          </a:p>
+        </p:txBody>
+      </p:sp>
+    </p:spTree>
+    <p:extLst>
+      <p:ext uri="{BB962C8B-B14F-4D97-AF65-F5344CB8AC3E}">
+        <p14:creationId xmlns:p14="http://schemas.microsoft.com/office/powerpoint/2010/main" val="2827429624"/>
+      </p:ext>
+    </p:extLst>
+  </p:cSld>
+  <p:clrMapOvr>
+    <a:masterClrMapping/>
+  </p:clrMapOvr>
+</p:sld>
+</file>
+
+<file path=ppt/slides/slide13.xml><?xml version="1.0" encoding="utf-8"?>
 <p:sld xmlns:a="http://schemas.openxmlformats.org/drawingml/2006/main" xmlns:r="http://schemas.openxmlformats.org/officeDocument/2006/relationships" xmlns:p="http://schemas.openxmlformats.org/presentationml/2006/main">
   <p:cSld>
     <p:spTree>
@@ -23346,7 +23460,7 @@
 </p:sld>
 </file>
 
-<file path=ppt/slides/slide13.xml><?xml version="1.0" encoding="utf-8"?>
+<file path=ppt/slides/slide14.xml><?xml version="1.0" encoding="utf-8"?>
 <p:sld xmlns:a="http://schemas.openxmlformats.org/drawingml/2006/main" xmlns:r="http://schemas.openxmlformats.org/officeDocument/2006/relationships" xmlns:p="http://schemas.openxmlformats.org/presentationml/2006/main">
   <p:cSld>
     <p:bg>
@@ -23791,7 +23905,7 @@
 </p:sld>
 </file>
 
-<file path=ppt/slides/slide14.xml><?xml version="1.0" encoding="utf-8"?>
+<file path=ppt/slides/slide15.xml><?xml version="1.0" encoding="utf-8"?>
 <p:sld xmlns:a="http://schemas.openxmlformats.org/drawingml/2006/main" xmlns:r="http://schemas.openxmlformats.org/officeDocument/2006/relationships" xmlns:p="http://schemas.openxmlformats.org/presentationml/2006/main">
   <p:cSld>
     <p:spTree>
@@ -23884,7 +23998,7 @@
 </p:sld>
 </file>
 
-<file path=ppt/slides/slide15.xml><?xml version="1.0" encoding="utf-8"?>
+<file path=ppt/slides/slide16.xml><?xml version="1.0" encoding="utf-8"?>
 <p:sld xmlns:a="http://schemas.openxmlformats.org/drawingml/2006/main" xmlns:r="http://schemas.openxmlformats.org/officeDocument/2006/relationships" xmlns:p="http://schemas.openxmlformats.org/presentationml/2006/main">
   <p:cSld>
     <p:spTree>
@@ -24003,7 +24117,7 @@
 </p:sld>
 </file>
 
-<file path=ppt/slides/slide16.xml><?xml version="1.0" encoding="utf-8"?>
+<file path=ppt/slides/slide17.xml><?xml version="1.0" encoding="utf-8"?>
 <p:sld xmlns:a="http://schemas.openxmlformats.org/drawingml/2006/main" xmlns:r="http://schemas.openxmlformats.org/officeDocument/2006/relationships" xmlns:p="http://schemas.openxmlformats.org/presentationml/2006/main">
   <p:cSld>
     <p:spTree>
@@ -24195,7 +24309,7 @@
 </p:sld>
 </file>
 
-<file path=ppt/slides/slide17.xml><?xml version="1.0" encoding="utf-8"?>
+<file path=ppt/slides/slide18.xml><?xml version="1.0" encoding="utf-8"?>
 <p:sld xmlns:a="http://schemas.openxmlformats.org/drawingml/2006/main" xmlns:r="http://schemas.openxmlformats.org/officeDocument/2006/relationships" xmlns:p="http://schemas.openxmlformats.org/presentationml/2006/main">
   <p:cSld>
     <p:spTree>
@@ -24400,6 +24514,194 @@
     <p:extLst>
       <p:ext uri="{BB962C8B-B14F-4D97-AF65-F5344CB8AC3E}">
         <p14:creationId xmlns:p14="http://schemas.microsoft.com/office/powerpoint/2010/main" val="377427585"/>
+      </p:ext>
+    </p:extLst>
+  </p:cSld>
+  <p:clrMapOvr>
+    <a:masterClrMapping/>
+  </p:clrMapOvr>
+</p:sld>
+</file>
+
+<file path=ppt/slides/slide19.xml><?xml version="1.0" encoding="utf-8"?>
+<p:sld xmlns:a="http://schemas.openxmlformats.org/drawingml/2006/main" xmlns:r="http://schemas.openxmlformats.org/officeDocument/2006/relationships" xmlns:p="http://schemas.openxmlformats.org/presentationml/2006/main">
+  <p:cSld>
+    <p:spTree>
+      <p:nvGrpSpPr>
+        <p:cNvPr id="1" name=""/>
+        <p:cNvGrpSpPr/>
+        <p:nvPr/>
+      </p:nvGrpSpPr>
+      <p:grpSpPr>
+        <a:xfrm>
+          <a:off x="0" y="0"/>
+          <a:ext cx="0" cy="0"/>
+          <a:chOff x="0" y="0"/>
+          <a:chExt cx="0" cy="0"/>
+        </a:xfrm>
+      </p:grpSpPr>
+      <p:sp>
+        <p:nvSpPr>
+          <p:cNvPr id="2" name="Title 1">
+            <a:extLst>
+              <a:ext uri="{FF2B5EF4-FFF2-40B4-BE49-F238E27FC236}">
+                <a16:creationId xmlns:a16="http://schemas.microsoft.com/office/drawing/2014/main" id="{09FA7F1F-96D5-B021-759A-C7BD3A5FCFE8}"/>
+              </a:ext>
+            </a:extLst>
+          </p:cNvPr>
+          <p:cNvSpPr>
+            <a:spLocks noGrp="1"/>
+          </p:cNvSpPr>
+          <p:nvPr>
+            <p:ph type="title"/>
+          </p:nvPr>
+        </p:nvSpPr>
+        <p:spPr>
+          <a:xfrm>
+            <a:off x="225251" y="128788"/>
+            <a:ext cx="10515600" cy="735370"/>
+          </a:xfrm>
+        </p:spPr>
+        <p:txBody>
+          <a:bodyPr/>
+          <a:lstStyle/>
+          <a:p>
+            <a:r>
+              <a:rPr lang="en-US" dirty="0"/>
+              <a:t>Preprocessing </a:t>
+            </a:r>
+          </a:p>
+        </p:txBody>
+      </p:sp>
+      <p:graphicFrame>
+        <p:nvGraphicFramePr>
+          <p:cNvPr id="7" name="Content Placeholder 2">
+            <a:extLst>
+              <a:ext uri="{FF2B5EF4-FFF2-40B4-BE49-F238E27FC236}">
+                <a16:creationId xmlns:a16="http://schemas.microsoft.com/office/drawing/2014/main" id="{E7D88959-6001-24CA-0280-54B1B8AE0991}"/>
+              </a:ext>
+            </a:extLst>
+          </p:cNvPr>
+          <p:cNvGraphicFramePr>
+            <a:graphicFrameLocks noGrp="1"/>
+          </p:cNvGraphicFramePr>
+          <p:nvPr>
+            <p:ph idx="1"/>
+            <p:extLst>
+              <p:ext uri="{D42A27DB-BD31-4B8C-83A1-F6EECF244321}">
+                <p14:modId xmlns:p14="http://schemas.microsoft.com/office/powerpoint/2010/main" val="1608420126"/>
+              </p:ext>
+            </p:extLst>
+          </p:nvPr>
+        </p:nvGraphicFramePr>
+        <p:xfrm>
+          <a:off x="456362" y="864158"/>
+          <a:ext cx="10757598" cy="5865054"/>
+        </p:xfrm>
+        <a:graphic>
+          <a:graphicData uri="http://schemas.openxmlformats.org/drawingml/2006/diagram">
+            <dgm:relIds xmlns:dgm="http://schemas.openxmlformats.org/drawingml/2006/diagram" xmlns:r="http://schemas.openxmlformats.org/officeDocument/2006/relationships" r:dm="rId2" r:lo="rId3" r:qs="rId4" r:cs="rId5"/>
+          </a:graphicData>
+        </a:graphic>
+      </p:graphicFrame>
+      <p:sp>
+        <p:nvSpPr>
+          <p:cNvPr id="4" name="TextBox 3">
+            <a:extLst>
+              <a:ext uri="{FF2B5EF4-FFF2-40B4-BE49-F238E27FC236}">
+                <a16:creationId xmlns:a16="http://schemas.microsoft.com/office/drawing/2014/main" id="{CB41735F-57F3-2F67-4F3D-C8CD29B6C37B}"/>
+              </a:ext>
+            </a:extLst>
+          </p:cNvPr>
+          <p:cNvSpPr txBox="1"/>
+          <p:nvPr/>
+        </p:nvSpPr>
+        <p:spPr>
+          <a:xfrm>
+            <a:off x="8920802" y="6004911"/>
+            <a:ext cx="1951513" cy="738664"/>
+          </a:xfrm>
+          <a:prstGeom prst="rect">
+            <a:avLst/>
+          </a:prstGeom>
+          <a:noFill/>
+        </p:spPr>
+        <p:txBody>
+          <a:bodyPr wrap="square" rtlCol="0">
+            <a:spAutoFit/>
+          </a:bodyPr>
+          <a:lstStyle/>
+          <a:p>
+            <a:r>
+              <a:rPr lang="en-US" sz="1400" dirty="0"/>
+              <a:t>After RUS&gt;&gt;target</a:t>
+            </a:r>
+          </a:p>
+          <a:p>
+            <a:r>
+              <a:rPr lang="en-US" sz="1400" dirty="0"/>
+              <a:t>                       0.0    3026</a:t>
+            </a:r>
+          </a:p>
+          <a:p>
+            <a:r>
+              <a:rPr lang="en-US" sz="1400" dirty="0"/>
+              <a:t>                       1.0    3026</a:t>
+            </a:r>
+          </a:p>
+        </p:txBody>
+      </p:sp>
+      <p:sp>
+        <p:nvSpPr>
+          <p:cNvPr id="5" name="TextBox 4">
+            <a:extLst>
+              <a:ext uri="{FF2B5EF4-FFF2-40B4-BE49-F238E27FC236}">
+                <a16:creationId xmlns:a16="http://schemas.microsoft.com/office/drawing/2014/main" id="{EB373184-3645-F3E0-0522-3BFFFAEA235B}"/>
+              </a:ext>
+            </a:extLst>
+          </p:cNvPr>
+          <p:cNvSpPr txBox="1"/>
+          <p:nvPr/>
+        </p:nvSpPr>
+        <p:spPr>
+          <a:xfrm>
+            <a:off x="6962215" y="6004911"/>
+            <a:ext cx="1870284" cy="738664"/>
+          </a:xfrm>
+          <a:prstGeom prst="rect">
+            <a:avLst/>
+          </a:prstGeom>
+          <a:noFill/>
+        </p:spPr>
+        <p:txBody>
+          <a:bodyPr wrap="square" rtlCol="0">
+            <a:spAutoFit/>
+          </a:bodyPr>
+          <a:lstStyle/>
+          <a:p>
+            <a:r>
+              <a:rPr lang="en-US" sz="1400" dirty="0"/>
+              <a:t>Before RUS &gt;&gt;target</a:t>
+            </a:r>
+          </a:p>
+          <a:p>
+            <a:r>
+              <a:rPr lang="en-US" sz="1400" dirty="0"/>
+              <a:t>                      0.0    8697</a:t>
+            </a:r>
+          </a:p>
+          <a:p>
+            <a:r>
+              <a:rPr lang="en-US" sz="1400" dirty="0"/>
+              <a:t>                      1.0    3026</a:t>
+            </a:r>
+          </a:p>
+        </p:txBody>
+      </p:sp>
+    </p:spTree>
+    <p:extLst>
+      <p:ext uri="{BB962C8B-B14F-4D97-AF65-F5344CB8AC3E}">
+        <p14:creationId xmlns:p14="http://schemas.microsoft.com/office/powerpoint/2010/main" val="1242649840"/>
       </p:ext>
     </p:extLst>
   </p:cSld>
@@ -29964,194 +30266,6 @@
           <p:cNvPr id="2" name="Title 1">
             <a:extLst>
               <a:ext uri="{FF2B5EF4-FFF2-40B4-BE49-F238E27FC236}">
-                <a16:creationId xmlns:a16="http://schemas.microsoft.com/office/drawing/2014/main" id="{09FA7F1F-96D5-B021-759A-C7BD3A5FCFE8}"/>
-              </a:ext>
-            </a:extLst>
-          </p:cNvPr>
-          <p:cNvSpPr>
-            <a:spLocks noGrp="1"/>
-          </p:cNvSpPr>
-          <p:nvPr>
-            <p:ph type="title"/>
-          </p:nvPr>
-        </p:nvSpPr>
-        <p:spPr>
-          <a:xfrm>
-            <a:off x="225251" y="128788"/>
-            <a:ext cx="10515600" cy="735370"/>
-          </a:xfrm>
-        </p:spPr>
-        <p:txBody>
-          <a:bodyPr/>
-          <a:lstStyle/>
-          <a:p>
-            <a:r>
-              <a:rPr lang="en-US" dirty="0"/>
-              <a:t>Preprocessing </a:t>
-            </a:r>
-          </a:p>
-        </p:txBody>
-      </p:sp>
-      <p:graphicFrame>
-        <p:nvGraphicFramePr>
-          <p:cNvPr id="7" name="Content Placeholder 2">
-            <a:extLst>
-              <a:ext uri="{FF2B5EF4-FFF2-40B4-BE49-F238E27FC236}">
-                <a16:creationId xmlns:a16="http://schemas.microsoft.com/office/drawing/2014/main" id="{E7D88959-6001-24CA-0280-54B1B8AE0991}"/>
-              </a:ext>
-            </a:extLst>
-          </p:cNvPr>
-          <p:cNvGraphicFramePr>
-            <a:graphicFrameLocks noGrp="1"/>
-          </p:cNvGraphicFramePr>
-          <p:nvPr>
-            <p:ph idx="1"/>
-            <p:extLst>
-              <p:ext uri="{D42A27DB-BD31-4B8C-83A1-F6EECF244321}">
-                <p14:modId xmlns:p14="http://schemas.microsoft.com/office/powerpoint/2010/main" val="1608420126"/>
-              </p:ext>
-            </p:extLst>
-          </p:nvPr>
-        </p:nvGraphicFramePr>
-        <p:xfrm>
-          <a:off x="456362" y="864158"/>
-          <a:ext cx="10757598" cy="5865054"/>
-        </p:xfrm>
-        <a:graphic>
-          <a:graphicData uri="http://schemas.openxmlformats.org/drawingml/2006/diagram">
-            <dgm:relIds xmlns:dgm="http://schemas.openxmlformats.org/drawingml/2006/diagram" xmlns:r="http://schemas.openxmlformats.org/officeDocument/2006/relationships" r:dm="rId2" r:lo="rId3" r:qs="rId4" r:cs="rId5"/>
-          </a:graphicData>
-        </a:graphic>
-      </p:graphicFrame>
-      <p:sp>
-        <p:nvSpPr>
-          <p:cNvPr id="4" name="TextBox 3">
-            <a:extLst>
-              <a:ext uri="{FF2B5EF4-FFF2-40B4-BE49-F238E27FC236}">
-                <a16:creationId xmlns:a16="http://schemas.microsoft.com/office/drawing/2014/main" id="{CB41735F-57F3-2F67-4F3D-C8CD29B6C37B}"/>
-              </a:ext>
-            </a:extLst>
-          </p:cNvPr>
-          <p:cNvSpPr txBox="1"/>
-          <p:nvPr/>
-        </p:nvSpPr>
-        <p:spPr>
-          <a:xfrm>
-            <a:off x="8920802" y="6004911"/>
-            <a:ext cx="1951513" cy="738664"/>
-          </a:xfrm>
-          <a:prstGeom prst="rect">
-            <a:avLst/>
-          </a:prstGeom>
-          <a:noFill/>
-        </p:spPr>
-        <p:txBody>
-          <a:bodyPr wrap="square" rtlCol="0">
-            <a:spAutoFit/>
-          </a:bodyPr>
-          <a:lstStyle/>
-          <a:p>
-            <a:r>
-              <a:rPr lang="en-US" sz="1400" dirty="0"/>
-              <a:t>After RUS&gt;&gt;target</a:t>
-            </a:r>
-          </a:p>
-          <a:p>
-            <a:r>
-              <a:rPr lang="en-US" sz="1400" dirty="0"/>
-              <a:t>                       0.0    3026</a:t>
-            </a:r>
-          </a:p>
-          <a:p>
-            <a:r>
-              <a:rPr lang="en-US" sz="1400" dirty="0"/>
-              <a:t>                       1.0    3026</a:t>
-            </a:r>
-          </a:p>
-        </p:txBody>
-      </p:sp>
-      <p:sp>
-        <p:nvSpPr>
-          <p:cNvPr id="5" name="TextBox 4">
-            <a:extLst>
-              <a:ext uri="{FF2B5EF4-FFF2-40B4-BE49-F238E27FC236}">
-                <a16:creationId xmlns:a16="http://schemas.microsoft.com/office/drawing/2014/main" id="{EB373184-3645-F3E0-0522-3BFFFAEA235B}"/>
-              </a:ext>
-            </a:extLst>
-          </p:cNvPr>
-          <p:cNvSpPr txBox="1"/>
-          <p:nvPr/>
-        </p:nvSpPr>
-        <p:spPr>
-          <a:xfrm>
-            <a:off x="6962215" y="6004911"/>
-            <a:ext cx="1870284" cy="738664"/>
-          </a:xfrm>
-          <a:prstGeom prst="rect">
-            <a:avLst/>
-          </a:prstGeom>
-          <a:noFill/>
-        </p:spPr>
-        <p:txBody>
-          <a:bodyPr wrap="square" rtlCol="0">
-            <a:spAutoFit/>
-          </a:bodyPr>
-          <a:lstStyle/>
-          <a:p>
-            <a:r>
-              <a:rPr lang="en-US" sz="1400" dirty="0"/>
-              <a:t>Before RUS &gt;&gt;target</a:t>
-            </a:r>
-          </a:p>
-          <a:p>
-            <a:r>
-              <a:rPr lang="en-US" sz="1400" dirty="0"/>
-              <a:t>                      0.0    8697</a:t>
-            </a:r>
-          </a:p>
-          <a:p>
-            <a:r>
-              <a:rPr lang="en-US" sz="1400" dirty="0"/>
-              <a:t>                      1.0    3026</a:t>
-            </a:r>
-          </a:p>
-        </p:txBody>
-      </p:sp>
-    </p:spTree>
-    <p:extLst>
-      <p:ext uri="{BB962C8B-B14F-4D97-AF65-F5344CB8AC3E}">
-        <p14:creationId xmlns:p14="http://schemas.microsoft.com/office/powerpoint/2010/main" val="1242649840"/>
-      </p:ext>
-    </p:extLst>
-  </p:cSld>
-  <p:clrMapOvr>
-    <a:masterClrMapping/>
-  </p:clrMapOvr>
-</p:sld>
-</file>
-
-<file path=ppt/slides/slide9.xml><?xml version="1.0" encoding="utf-8"?>
-<p:sld xmlns:a="http://schemas.openxmlformats.org/drawingml/2006/main" xmlns:r="http://schemas.openxmlformats.org/officeDocument/2006/relationships" xmlns:p="http://schemas.openxmlformats.org/presentationml/2006/main">
-  <p:cSld>
-    <p:spTree>
-      <p:nvGrpSpPr>
-        <p:cNvPr id="1" name=""/>
-        <p:cNvGrpSpPr/>
-        <p:nvPr/>
-      </p:nvGrpSpPr>
-      <p:grpSpPr>
-        <a:xfrm>
-          <a:off x="0" y="0"/>
-          <a:ext cx="0" cy="0"/>
-          <a:chOff x="0" y="0"/>
-          <a:chExt cx="0" cy="0"/>
-        </a:xfrm>
-      </p:grpSpPr>
-      <p:sp>
-        <p:nvSpPr>
-          <p:cNvPr id="2" name="Title 1">
-            <a:extLst>
-              <a:ext uri="{FF2B5EF4-FFF2-40B4-BE49-F238E27FC236}">
                 <a16:creationId xmlns:a16="http://schemas.microsoft.com/office/drawing/2014/main" id="{082DF06F-6171-3BE9-B43F-135BC964EE8D}"/>
               </a:ext>
             </a:extLst>
@@ -30215,6 +30329,101 @@
     <p:extLst>
       <p:ext uri="{BB962C8B-B14F-4D97-AF65-F5344CB8AC3E}">
         <p14:creationId xmlns:p14="http://schemas.microsoft.com/office/powerpoint/2010/main" val="302878009"/>
+      </p:ext>
+    </p:extLst>
+  </p:cSld>
+  <p:clrMapOvr>
+    <a:masterClrMapping/>
+  </p:clrMapOvr>
+</p:sld>
+</file>
+
+<file path=ppt/slides/slide9.xml><?xml version="1.0" encoding="utf-8"?>
+<p:sld xmlns:a="http://schemas.openxmlformats.org/drawingml/2006/main" xmlns:r="http://schemas.openxmlformats.org/officeDocument/2006/relationships" xmlns:p="http://schemas.openxmlformats.org/presentationml/2006/main">
+  <p:cSld>
+    <p:spTree>
+      <p:nvGrpSpPr>
+        <p:cNvPr id="1" name=""/>
+        <p:cNvGrpSpPr/>
+        <p:nvPr/>
+      </p:nvGrpSpPr>
+      <p:grpSpPr>
+        <a:xfrm>
+          <a:off x="0" y="0"/>
+          <a:ext cx="0" cy="0"/>
+          <a:chOff x="0" y="0"/>
+          <a:chExt cx="0" cy="0"/>
+        </a:xfrm>
+      </p:grpSpPr>
+      <p:sp>
+        <p:nvSpPr>
+          <p:cNvPr id="2" name="Title 1">
+            <a:extLst>
+              <a:ext uri="{FF2B5EF4-FFF2-40B4-BE49-F238E27FC236}">
+                <a16:creationId xmlns:a16="http://schemas.microsoft.com/office/drawing/2014/main" id="{7E65967C-A035-73A3-090A-E37B8CB2A77B}"/>
+              </a:ext>
+            </a:extLst>
+          </p:cNvPr>
+          <p:cNvSpPr>
+            <a:spLocks noGrp="1"/>
+          </p:cNvSpPr>
+          <p:nvPr>
+            <p:ph type="title"/>
+          </p:nvPr>
+        </p:nvSpPr>
+        <p:spPr>
+          <a:xfrm>
+            <a:off x="476458" y="224448"/>
+            <a:ext cx="11034223" cy="941161"/>
+          </a:xfrm>
+        </p:spPr>
+        <p:txBody>
+          <a:bodyPr>
+            <a:noAutofit/>
+          </a:bodyPr>
+          <a:lstStyle/>
+          <a:p>
+            <a:r>
+              <a:rPr lang="en-US" sz="2800" dirty="0"/>
+              <a:t>How Relevant experience influence candidate to look for job change?</a:t>
+            </a:r>
+          </a:p>
+        </p:txBody>
+      </p:sp>
+      <p:pic>
+        <p:nvPicPr>
+          <p:cNvPr id="6" name="Picture 5">
+            <a:extLst>
+              <a:ext uri="{FF2B5EF4-FFF2-40B4-BE49-F238E27FC236}">
+                <a16:creationId xmlns:a16="http://schemas.microsoft.com/office/drawing/2014/main" id="{CF95B237-19D6-E6B4-78C0-736C2DDC2825}"/>
+              </a:ext>
+            </a:extLst>
+          </p:cNvPr>
+          <p:cNvPicPr>
+            <a:picLocks noChangeAspect="1"/>
+          </p:cNvPicPr>
+          <p:nvPr/>
+        </p:nvPicPr>
+        <p:blipFill>
+          <a:blip r:embed="rId2"/>
+          <a:stretch>
+            <a:fillRect/>
+          </a:stretch>
+        </p:blipFill>
+        <p:spPr>
+          <a:xfrm>
+            <a:off x="322729" y="1085222"/>
+            <a:ext cx="11584568" cy="5407654"/>
+          </a:xfrm>
+          <a:prstGeom prst="rect">
+            <a:avLst/>
+          </a:prstGeom>
+        </p:spPr>
+      </p:pic>
+    </p:spTree>
+    <p:extLst>
+      <p:ext uri="{BB962C8B-B14F-4D97-AF65-F5344CB8AC3E}">
+        <p14:creationId xmlns:p14="http://schemas.microsoft.com/office/powerpoint/2010/main" val="3226003453"/>
       </p:ext>
     </p:extLst>
   </p:cSld>
@@ -30855,6 +31064,15 @@
 </file>
 
 <file path=customXml/item1.xml><?xml version="1.0" encoding="utf-8"?>
+<?mso-contentType ?>
+<FormTemplates xmlns="http://schemas.microsoft.com/sharepoint/v3/contenttype/forms">
+  <Display>DocumentLibraryForm</Display>
+  <Edit>DocumentLibraryForm</Edit>
+  <New>DocumentLibraryForm</New>
+</FormTemplates>
+</file>
+
+<file path=customXml/item2.xml><?xml version="1.0" encoding="utf-8"?>
 <ct:contentTypeSchema xmlns:ct="http://schemas.microsoft.com/office/2006/metadata/contentType" xmlns:ma="http://schemas.microsoft.com/office/2006/metadata/properties/metaAttributes" ct:_="" ma:_="" ma:contentTypeName="Document" ma:contentTypeID="0x0101005120618B5A2E8644805649BA27689955" ma:contentTypeVersion="5" ma:contentTypeDescription="Create a new document." ma:contentTypeScope="" ma:versionID="c0306d6e4b6731d442d5861b8e879571">
   <xsd:schema xmlns:xsd="http://www.w3.org/2001/XMLSchema" xmlns:xs="http://www.w3.org/2001/XMLSchema" xmlns:p="http://schemas.microsoft.com/office/2006/metadata/properties" xmlns:ns3="ec1fa480-caa0-4813-ad98-c11e8e01f7d6" targetNamespace="http://schemas.microsoft.com/office/2006/metadata/properties" ma:root="true" ma:fieldsID="e6261c365ba495ad7880cdacf7a8a73e" ns3:_="">
     <xsd:import namespace="ec1fa480-caa0-4813-ad98-c11e8e01f7d6"/>
@@ -31004,15 +31222,6 @@
 </ct:contentTypeSchema>
 </file>
 
-<file path=customXml/item2.xml><?xml version="1.0" encoding="utf-8"?>
-<?mso-contentType ?>
-<FormTemplates xmlns="http://schemas.microsoft.com/sharepoint/v3/contenttype/forms">
-  <Display>DocumentLibraryForm</Display>
-  <Edit>DocumentLibraryForm</Edit>
-  <New>DocumentLibraryForm</New>
-</FormTemplates>
-</file>
-
 <file path=customXml/item3.xml><?xml version="1.0" encoding="utf-8"?>
 <p:properties xmlns:p="http://schemas.microsoft.com/office/2006/metadata/properties" xmlns:xsi="http://www.w3.org/2001/XMLSchema-instance" xmlns:pc="http://schemas.microsoft.com/office/infopath/2007/PartnerControls">
   <documentManagement/>
@@ -31020,6 +31229,14 @@
 </file>
 
 <file path=customXml/itemProps1.xml><?xml version="1.0" encoding="utf-8"?>
+<ds:datastoreItem xmlns:ds="http://schemas.openxmlformats.org/officeDocument/2006/customXml" ds:itemID="{9D1EA841-7D0A-40E4-A4C0-A2D83A63F6E7}">
+  <ds:schemaRefs>
+    <ds:schemaRef ds:uri="http://schemas.microsoft.com/sharepoint/v3/contenttype/forms"/>
+  </ds:schemaRefs>
+</ds:datastoreItem>
+</file>
+
+<file path=customXml/itemProps2.xml><?xml version="1.0" encoding="utf-8"?>
 <ds:datastoreItem xmlns:ds="http://schemas.openxmlformats.org/officeDocument/2006/customXml" ds:itemID="{BE42E56A-8F12-4BAB-BB7B-4AB6926F7375}">
   <ds:schemaRefs>
     <ds:schemaRef ds:uri="http://schemas.microsoft.com/office/2006/metadata/contentType"/>
@@ -31033,14 +31250,6 @@
     <ds:schemaRef ds:uri="http://purl.org/dc/elements/1.1/"/>
     <ds:schemaRef ds:uri="http://purl.org/dc/terms/"/>
     <ds:schemaRef ds:uri="http://schemas.microsoft.com/internal/obd"/>
-  </ds:schemaRefs>
-</ds:datastoreItem>
-</file>
-
-<file path=customXml/itemProps2.xml><?xml version="1.0" encoding="utf-8"?>
-<ds:datastoreItem xmlns:ds="http://schemas.openxmlformats.org/officeDocument/2006/customXml" ds:itemID="{9D1EA841-7D0A-40E4-A4C0-A2D83A63F6E7}">
-  <ds:schemaRefs>
-    <ds:schemaRef ds:uri="http://schemas.microsoft.com/sharepoint/v3/contenttype/forms"/>
   </ds:schemaRefs>
 </ds:datastoreItem>
 </file>
